--- a/output_pptx/All_Creatures_Of_Our_God_And_King.pptx
+++ b/output_pptx/All_Creatures_Of_Our_God_And_King.pptx
@@ -3113,8 +3113,8 @@
         </p:nvSpPr>
         <p:spPr>
           <a:xfrm>
-            <a:off x="594360" y="1837944"/>
-            <a:ext cx="11002975" cy="685800"/>
+            <a:off x="640080" y="1650492"/>
+            <a:ext cx="10911535" cy="731520"/>
           </a:xfrm>
           <a:prstGeom prst="rect">
             <a:avLst/>
@@ -3129,7 +3129,7 @@
           <a:p>
             <a:pPr algn="ctr"/>
             <a:r>
-              <a:rPr sz="4400" b="1" i="0">
+              <a:rPr sz="4800" b="1" i="0">
                 <a:solidFill>
                   <a:srgbClr val="FFFFFF"/>
                 </a:solidFill>
@@ -3148,8 +3148,8 @@
         </p:nvSpPr>
         <p:spPr>
           <a:xfrm>
-            <a:off x="594360" y="2560320"/>
-            <a:ext cx="11002975" cy="384048"/>
+            <a:off x="640080" y="2418588"/>
+            <a:ext cx="10911535" cy="365760"/>
           </a:xfrm>
           <a:prstGeom prst="rect">
             <a:avLst/>
@@ -3166,7 +3166,7 @@
             <a:r>
               <a:rPr sz="2400" b="0" i="1">
                 <a:solidFill>
-                  <a:srgbClr val="B4B4B4"/>
+                  <a:srgbClr val="AAAAAA"/>
                 </a:solidFill>
                 <a:latin typeface="Arial"/>
               </a:rPr>
@@ -3183,8 +3183,8 @@
         </p:nvSpPr>
         <p:spPr>
           <a:xfrm>
-            <a:off x="594360" y="2980944"/>
-            <a:ext cx="11002975" cy="347472"/>
+            <a:off x="640080" y="2985516"/>
+            <a:ext cx="10911535" cy="731520"/>
           </a:xfrm>
           <a:prstGeom prst="rect">
             <a:avLst/>
@@ -3199,13 +3199,13 @@
           <a:p>
             <a:pPr algn="ctr"/>
             <a:r>
-              <a:rPr sz="2000" b="0" i="1">
-                <a:solidFill>
-                  <a:srgbClr val="8C8C8C"/>
+              <a:rPr sz="4800" b="1" i="0">
+                <a:solidFill>
+                  <a:srgbClr val="FFFFFF"/>
                 </a:solidFill>
                 <a:latin typeface="Arial"/>
               </a:rPr>
-              <a:t/>
+              <a:t>ハレルヤ      ハレルヤ</a:t>
             </a:r>
           </a:p>
         </p:txBody>
@@ -3218,8 +3218,8 @@
         </p:nvSpPr>
         <p:spPr>
           <a:xfrm>
-            <a:off x="594360" y="3529584"/>
-            <a:ext cx="11002975" cy="685800"/>
+            <a:off x="640080" y="3753612"/>
+            <a:ext cx="10911535" cy="365760"/>
           </a:xfrm>
           <a:prstGeom prst="rect">
             <a:avLst/>
@@ -3234,13 +3234,13 @@
           <a:p>
             <a:pPr algn="ctr"/>
             <a:r>
-              <a:rPr sz="4400" b="1" i="0">
-                <a:solidFill>
-                  <a:srgbClr val="FFFFFF"/>
+              <a:rPr sz="2400" b="0" i="1">
+                <a:solidFill>
+                  <a:srgbClr val="AAAAAA"/>
                 </a:solidFill>
                 <a:latin typeface="Arial"/>
               </a:rPr>
-              <a:t>ハレルヤ      ハレルヤ</a:t>
+              <a:t>hallelujah    hallelujah</a:t>
             </a:r>
           </a:p>
         </p:txBody>
@@ -3253,8 +3253,8 @@
         </p:nvSpPr>
         <p:spPr>
           <a:xfrm>
-            <a:off x="594360" y="4251960"/>
-            <a:ext cx="11002975" cy="384048"/>
+            <a:off x="640080" y="4530852"/>
+            <a:ext cx="10911535" cy="310896"/>
           </a:xfrm>
           <a:prstGeom prst="rect">
             <a:avLst/>
@@ -3269,13 +3269,13 @@
           <a:p>
             <a:pPr algn="ctr"/>
             <a:r>
-              <a:rPr sz="2400" b="0" i="1">
-                <a:solidFill>
-                  <a:srgbClr val="B4B4B4"/>
+              <a:rPr sz="2000" b="0" i="1">
+                <a:solidFill>
+                  <a:srgbClr val="828282"/>
                 </a:solidFill>
                 <a:latin typeface="Arial"/>
               </a:rPr>
-              <a:t>hallelujah    hallelujah</a:t>
+              <a:t>Todas as criaturas do nosso Deus e Rei</a:t>
             </a:r>
           </a:p>
         </p:txBody>
@@ -3288,8 +3288,8 @@
         </p:nvSpPr>
         <p:spPr>
           <a:xfrm>
-            <a:off x="594360" y="4672584"/>
-            <a:ext cx="11002975" cy="347472"/>
+            <a:off x="640080" y="4896612"/>
+            <a:ext cx="10911535" cy="310896"/>
           </a:xfrm>
           <a:prstGeom prst="rect">
             <a:avLst/>
@@ -3306,11 +3306,11 @@
             <a:r>
               <a:rPr sz="2000" b="0" i="1">
                 <a:solidFill>
-                  <a:srgbClr val="8C8C8C"/>
+                  <a:srgbClr val="828282"/>
                 </a:solidFill>
                 <a:latin typeface="Arial"/>
               </a:rPr>
-              <a:t/>
+              <a:t>Erguei a voz e cantai conosco</a:t>
             </a:r>
           </a:p>
         </p:txBody>
@@ -3349,8 +3349,8 @@
         </p:nvSpPr>
         <p:spPr>
           <a:xfrm>
-            <a:off x="594360" y="2894076"/>
-            <a:ext cx="11002975" cy="685800"/>
+            <a:off x="640080" y="2702052"/>
+            <a:ext cx="10911535" cy="731520"/>
           </a:xfrm>
           <a:prstGeom prst="rect">
             <a:avLst/>
@@ -3365,48 +3365,13 @@
           <a:p>
             <a:pPr algn="ctr"/>
             <a:r>
-              <a:rPr sz="4400" b="1" i="0">
+              <a:rPr sz="4800" b="1" i="0">
                 <a:solidFill>
                   <a:srgbClr val="FFFFFF"/>
                 </a:solidFill>
                 <a:latin typeface="Arial"/>
               </a:rPr>
               <a:t>Aleluia! Aleluia! Aleluia!</a:t>
-            </a:r>
-          </a:p>
-        </p:txBody>
-      </p:sp>
-      <p:sp>
-        <p:nvSpPr>
-          <p:cNvPr id="3" name="TextBox 2"/>
-          <p:cNvSpPr txBox="1"/>
-          <p:nvPr/>
-        </p:nvSpPr>
-        <p:spPr>
-          <a:xfrm>
-            <a:off x="594360" y="3616452"/>
-            <a:ext cx="11002975" cy="347472"/>
-          </a:xfrm>
-          <a:prstGeom prst="rect">
-            <a:avLst/>
-          </a:prstGeom>
-          <a:noFill/>
-        </p:spPr>
-        <p:txBody>
-          <a:bodyPr wrap="square">
-            <a:spAutoFit/>
-          </a:bodyPr>
-          <a:lstStyle/>
-          <a:p>
-            <a:pPr algn="ctr"/>
-            <a:r>
-              <a:rPr sz="2200" b="0" i="1">
-                <a:solidFill>
-                  <a:srgbClr val="8C8C8C"/>
-                </a:solidFill>
-                <a:latin typeface="Arial"/>
-              </a:rPr>
-              <a:t/>
             </a:r>
           </a:p>
         </p:txBody>
@@ -3445,8 +3410,8 @@
         </p:nvSpPr>
         <p:spPr>
           <a:xfrm>
-            <a:off x="594360" y="1837944"/>
-            <a:ext cx="11002975" cy="685800"/>
+            <a:off x="640080" y="1650492"/>
+            <a:ext cx="10911535" cy="731520"/>
           </a:xfrm>
           <a:prstGeom prst="rect">
             <a:avLst/>
@@ -3461,7 +3426,7 @@
           <a:p>
             <a:pPr algn="ctr"/>
             <a:r>
-              <a:rPr sz="4061" b="1" i="0">
+              <a:rPr sz="4400" b="1" i="0">
                 <a:solidFill>
                   <a:srgbClr val="FFFFFF"/>
                 </a:solidFill>
@@ -3480,8 +3445,8 @@
         </p:nvSpPr>
         <p:spPr>
           <a:xfrm>
-            <a:off x="594360" y="2560320"/>
-            <a:ext cx="11002975" cy="384048"/>
+            <a:off x="640080" y="2418588"/>
+            <a:ext cx="10911535" cy="365760"/>
           </a:xfrm>
           <a:prstGeom prst="rect">
             <a:avLst/>
@@ -3496,9 +3461,9 @@
           <a:p>
             <a:pPr algn="ctr"/>
             <a:r>
-              <a:rPr sz="2344" b="0" i="1">
-                <a:solidFill>
-                  <a:srgbClr val="B4B4B4"/>
+              <a:rPr sz="2400" b="0" i="1">
+                <a:solidFill>
+                  <a:srgbClr val="AAAAAA"/>
                 </a:solidFill>
                 <a:latin typeface="Arial"/>
               </a:rPr>
@@ -3515,8 +3480,8 @@
         </p:nvSpPr>
         <p:spPr>
           <a:xfrm>
-            <a:off x="594360" y="2980944"/>
-            <a:ext cx="11002975" cy="347472"/>
+            <a:off x="640080" y="2985516"/>
+            <a:ext cx="10911535" cy="731520"/>
           </a:xfrm>
           <a:prstGeom prst="rect">
             <a:avLst/>
@@ -3531,13 +3496,13 @@
           <a:p>
             <a:pPr algn="ctr"/>
             <a:r>
-              <a:rPr sz="2000" b="0" i="1">
-                <a:solidFill>
-                  <a:srgbClr val="8C8C8C"/>
+              <a:rPr sz="4800" b="1" i="0">
+                <a:solidFill>
+                  <a:srgbClr val="FFFFFF"/>
                 </a:solidFill>
                 <a:latin typeface="Arial"/>
               </a:rPr>
-              <a:t/>
+              <a:t>み神を           たたえよ</a:t>
             </a:r>
           </a:p>
         </p:txBody>
@@ -3550,8 +3515,8 @@
         </p:nvSpPr>
         <p:spPr>
           <a:xfrm>
-            <a:off x="594360" y="3529584"/>
-            <a:ext cx="11002975" cy="685800"/>
+            <a:off x="640080" y="3753612"/>
+            <a:ext cx="10911535" cy="365760"/>
           </a:xfrm>
           <a:prstGeom prst="rect">
             <a:avLst/>
@@ -3566,13 +3531,13 @@
           <a:p>
             <a:pPr algn="ctr"/>
             <a:r>
-              <a:rPr sz="4400" b="1" i="0">
-                <a:solidFill>
-                  <a:srgbClr val="FFFFFF"/>
+              <a:rPr sz="2400" b="0" i="1">
+                <a:solidFill>
+                  <a:srgbClr val="AAAAAA"/>
                 </a:solidFill>
                 <a:latin typeface="Arial"/>
               </a:rPr>
-              <a:t>み神を           たたえよ</a:t>
+              <a:t>mikami wo     tataeyo</a:t>
             </a:r>
           </a:p>
         </p:txBody>
@@ -3585,8 +3550,8 @@
         </p:nvSpPr>
         <p:spPr>
           <a:xfrm>
-            <a:off x="594360" y="4251960"/>
-            <a:ext cx="11002975" cy="384048"/>
+            <a:off x="640080" y="4530852"/>
+            <a:ext cx="10911535" cy="310896"/>
           </a:xfrm>
           <a:prstGeom prst="rect">
             <a:avLst/>
@@ -3601,13 +3566,13 @@
           <a:p>
             <a:pPr algn="ctr"/>
             <a:r>
-              <a:rPr sz="2400" b="0" i="1">
-                <a:solidFill>
-                  <a:srgbClr val="B4B4B4"/>
+              <a:rPr sz="2000" b="0" i="1">
+                <a:solidFill>
+                  <a:srgbClr val="828282"/>
                 </a:solidFill>
                 <a:latin typeface="Arial"/>
               </a:rPr>
-              <a:t>mikami wo     tataeyo</a:t>
+              <a:t>Aleluia! Aleluia!</a:t>
             </a:r>
           </a:p>
         </p:txBody>
@@ -3620,8 +3585,8 @@
         </p:nvSpPr>
         <p:spPr>
           <a:xfrm>
-            <a:off x="594360" y="4672584"/>
-            <a:ext cx="11002975" cy="347472"/>
+            <a:off x="640080" y="4896612"/>
+            <a:ext cx="10911535" cy="310896"/>
           </a:xfrm>
           <a:prstGeom prst="rect">
             <a:avLst/>
@@ -3638,11 +3603,11 @@
             <a:r>
               <a:rPr sz="2000" b="0" i="1">
                 <a:solidFill>
-                  <a:srgbClr val="8C8C8C"/>
+                  <a:srgbClr val="828282"/>
                 </a:solidFill>
                 <a:latin typeface="Arial"/>
               </a:rPr>
-              <a:t/>
+              <a:t>Ó Sol ardente com teu raio dourado</a:t>
             </a:r>
           </a:p>
         </p:txBody>
@@ -3681,8 +3646,8 @@
         </p:nvSpPr>
         <p:spPr>
           <a:xfrm>
-            <a:off x="594360" y="2683764"/>
-            <a:ext cx="11002975" cy="685800"/>
+            <a:off x="640080" y="2500884"/>
+            <a:ext cx="10911535" cy="731520"/>
           </a:xfrm>
           <a:prstGeom prst="rect">
             <a:avLst/>
@@ -3697,7 +3662,7 @@
           <a:p>
             <a:pPr algn="ctr"/>
             <a:r>
-              <a:rPr sz="4400" b="1" i="0">
+              <a:rPr sz="4800" b="1" i="0">
                 <a:solidFill>
                   <a:srgbClr val="FFFFFF"/>
                 </a:solidFill>
@@ -3716,8 +3681,8 @@
         </p:nvSpPr>
         <p:spPr>
           <a:xfrm>
-            <a:off x="594360" y="3406140"/>
-            <a:ext cx="11002975" cy="384048"/>
+            <a:off x="640080" y="3268980"/>
+            <a:ext cx="10911535" cy="365760"/>
           </a:xfrm>
           <a:prstGeom prst="rect">
             <a:avLst/>
@@ -3734,7 +3699,7 @@
             <a:r>
               <a:rPr sz="2400" b="0" i="1">
                 <a:solidFill>
-                  <a:srgbClr val="B4B4B4"/>
+                  <a:srgbClr val="AAAAAA"/>
                 </a:solidFill>
                 <a:latin typeface="Arial"/>
               </a:rPr>
@@ -3751,8 +3716,8 @@
         </p:nvSpPr>
         <p:spPr>
           <a:xfrm>
-            <a:off x="594360" y="3826764"/>
-            <a:ext cx="11002975" cy="347472"/>
+            <a:off x="640080" y="4046220"/>
+            <a:ext cx="10911535" cy="310896"/>
           </a:xfrm>
           <a:prstGeom prst="rect">
             <a:avLst/>
@@ -3769,11 +3734,11 @@
             <a:r>
               <a:rPr sz="2000" b="0" i="1">
                 <a:solidFill>
-                  <a:srgbClr val="8C8C8C"/>
+                  <a:srgbClr val="828282"/>
                 </a:solidFill>
                 <a:latin typeface="Arial"/>
               </a:rPr>
-              <a:t/>
+              <a:t>Ó lua prateada brilhando suave</a:t>
             </a:r>
           </a:p>
         </p:txBody>
@@ -3812,8 +3777,8 @@
         </p:nvSpPr>
         <p:spPr>
           <a:xfrm>
-            <a:off x="594360" y="1837944"/>
-            <a:ext cx="11002975" cy="685800"/>
+            <a:off x="640080" y="1650492"/>
+            <a:ext cx="10911535" cy="731520"/>
           </a:xfrm>
           <a:prstGeom prst="rect">
             <a:avLst/>
@@ -3828,7 +3793,7 @@
           <a:p>
             <a:pPr algn="ctr"/>
             <a:r>
-              <a:rPr sz="4223" b="1" i="0">
+              <a:rPr sz="4600" b="1" i="0">
                 <a:solidFill>
                   <a:srgbClr val="FFFFFF"/>
                 </a:solidFill>
@@ -3847,8 +3812,8 @@
         </p:nvSpPr>
         <p:spPr>
           <a:xfrm>
-            <a:off x="594360" y="2560320"/>
-            <a:ext cx="11002975" cy="384048"/>
+            <a:off x="640080" y="2418588"/>
+            <a:ext cx="10911535" cy="365760"/>
           </a:xfrm>
           <a:prstGeom prst="rect">
             <a:avLst/>
@@ -3865,7 +3830,7 @@
             <a:r>
               <a:rPr sz="2400" b="0" i="1">
                 <a:solidFill>
-                  <a:srgbClr val="B4B4B4"/>
+                  <a:srgbClr val="AAAAAA"/>
                 </a:solidFill>
                 <a:latin typeface="Arial"/>
               </a:rPr>
@@ -3882,8 +3847,8 @@
         </p:nvSpPr>
         <p:spPr>
           <a:xfrm>
-            <a:off x="594360" y="2980944"/>
-            <a:ext cx="11002975" cy="347472"/>
+            <a:off x="640080" y="2985516"/>
+            <a:ext cx="10911535" cy="731520"/>
           </a:xfrm>
           <a:prstGeom prst="rect">
             <a:avLst/>
@@ -3898,13 +3863,13 @@
           <a:p>
             <a:pPr algn="ctr"/>
             <a:r>
-              <a:rPr sz="2000" b="0" i="1">
-                <a:solidFill>
-                  <a:srgbClr val="8C8C8C"/>
+              <a:rPr sz="4800" b="1" i="0">
+                <a:solidFill>
+                  <a:srgbClr val="FFFFFF"/>
                 </a:solidFill>
                 <a:latin typeface="Arial"/>
               </a:rPr>
-              <a:t/>
+              <a:t>ハレルヤ      ハレルヤ</a:t>
             </a:r>
           </a:p>
         </p:txBody>
@@ -3917,8 +3882,8 @@
         </p:nvSpPr>
         <p:spPr>
           <a:xfrm>
-            <a:off x="594360" y="3529584"/>
-            <a:ext cx="11002975" cy="685800"/>
+            <a:off x="640080" y="3753612"/>
+            <a:ext cx="10911535" cy="365760"/>
           </a:xfrm>
           <a:prstGeom prst="rect">
             <a:avLst/>
@@ -3933,13 +3898,13 @@
           <a:p>
             <a:pPr algn="ctr"/>
             <a:r>
-              <a:rPr sz="4400" b="1" i="0">
-                <a:solidFill>
-                  <a:srgbClr val="FFFFFF"/>
+              <a:rPr sz="2400" b="0" i="1">
+                <a:solidFill>
+                  <a:srgbClr val="AAAAAA"/>
                 </a:solidFill>
                 <a:latin typeface="Arial"/>
               </a:rPr>
-              <a:t>ハレルヤ      ハレルヤ</a:t>
+              <a:t>hallelujah    hallelujah</a:t>
             </a:r>
           </a:p>
         </p:txBody>
@@ -3952,8 +3917,8 @@
         </p:nvSpPr>
         <p:spPr>
           <a:xfrm>
-            <a:off x="594360" y="4251960"/>
-            <a:ext cx="11002975" cy="384048"/>
+            <a:off x="640080" y="4530852"/>
+            <a:ext cx="10911535" cy="310896"/>
           </a:xfrm>
           <a:prstGeom prst="rect">
             <a:avLst/>
@@ -3968,13 +3933,13 @@
           <a:p>
             <a:pPr algn="ctr"/>
             <a:r>
-              <a:rPr sz="2400" b="0" i="1">
-                <a:solidFill>
-                  <a:srgbClr val="B4B4B4"/>
+              <a:rPr sz="2000" b="0" i="1">
+                <a:solidFill>
+                  <a:srgbClr val="828282"/>
                 </a:solidFill>
                 <a:latin typeface="Arial"/>
               </a:rPr>
-              <a:t>hallelujah    hallelujah</a:t>
+              <a:t>Todas as criaturas do nosso Deus e Rei</a:t>
             </a:r>
           </a:p>
         </p:txBody>
@@ -3987,8 +3952,8 @@
         </p:nvSpPr>
         <p:spPr>
           <a:xfrm>
-            <a:off x="594360" y="4672584"/>
-            <a:ext cx="11002975" cy="347472"/>
+            <a:off x="640080" y="4896612"/>
+            <a:ext cx="10911535" cy="310896"/>
           </a:xfrm>
           <a:prstGeom prst="rect">
             <a:avLst/>
@@ -4005,11 +3970,11 @@
             <a:r>
               <a:rPr sz="2000" b="0" i="1">
                 <a:solidFill>
-                  <a:srgbClr val="8C8C8C"/>
+                  <a:srgbClr val="828282"/>
                 </a:solidFill>
                 <a:latin typeface="Arial"/>
               </a:rPr>
-              <a:t/>
+              <a:t>Erguei a voz e cantai conosco</a:t>
             </a:r>
           </a:p>
         </p:txBody>
@@ -4048,8 +4013,8 @@
         </p:nvSpPr>
         <p:spPr>
           <a:xfrm>
-            <a:off x="594360" y="1837944"/>
-            <a:ext cx="11002975" cy="685800"/>
+            <a:off x="640080" y="1650492"/>
+            <a:ext cx="10911535" cy="731520"/>
           </a:xfrm>
           <a:prstGeom prst="rect">
             <a:avLst/>
@@ -4064,7 +4029,7 @@
           <a:p>
             <a:pPr algn="ctr"/>
             <a:r>
-              <a:rPr sz="3641" b="1" i="0">
+              <a:rPr sz="3900" b="1" i="0">
                 <a:solidFill>
                   <a:srgbClr val="FFFFFF"/>
                 </a:solidFill>
@@ -4083,8 +4048,8 @@
         </p:nvSpPr>
         <p:spPr>
           <a:xfrm>
-            <a:off x="594360" y="2560320"/>
-            <a:ext cx="11002975" cy="384048"/>
+            <a:off x="640080" y="2418588"/>
+            <a:ext cx="10911535" cy="365760"/>
           </a:xfrm>
           <a:prstGeom prst="rect">
             <a:avLst/>
@@ -4099,9 +4064,9 @@
           <a:p>
             <a:pPr algn="ctr"/>
             <a:r>
-              <a:rPr sz="2344" b="0" i="1">
-                <a:solidFill>
-                  <a:srgbClr val="B4B4B4"/>
+              <a:rPr sz="2400" b="0" i="1">
+                <a:solidFill>
+                  <a:srgbClr val="AAAAAA"/>
                 </a:solidFill>
                 <a:latin typeface="Arial"/>
               </a:rPr>
@@ -4118,8 +4083,8 @@
         </p:nvSpPr>
         <p:spPr>
           <a:xfrm>
-            <a:off x="594360" y="2980944"/>
-            <a:ext cx="11002975" cy="347472"/>
+            <a:off x="640080" y="2985516"/>
+            <a:ext cx="10911535" cy="731520"/>
           </a:xfrm>
           <a:prstGeom prst="rect">
             <a:avLst/>
@@ -4134,13 +4099,13 @@
           <a:p>
             <a:pPr algn="ctr"/>
             <a:r>
-              <a:rPr sz="2000" b="0" i="1">
-                <a:solidFill>
-                  <a:srgbClr val="8C8C8C"/>
+              <a:rPr sz="4800" b="1" i="0">
+                <a:solidFill>
+                  <a:srgbClr val="FFFFFF"/>
                 </a:solidFill>
                 <a:latin typeface="Arial"/>
               </a:rPr>
-              <a:t/>
+              <a:t>み神を          たたえよ</a:t>
             </a:r>
           </a:p>
         </p:txBody>
@@ -4153,8 +4118,8 @@
         </p:nvSpPr>
         <p:spPr>
           <a:xfrm>
-            <a:off x="594360" y="3529584"/>
-            <a:ext cx="11002975" cy="685800"/>
+            <a:off x="640080" y="3753612"/>
+            <a:ext cx="10911535" cy="365760"/>
           </a:xfrm>
           <a:prstGeom prst="rect">
             <a:avLst/>
@@ -4169,13 +4134,13 @@
           <a:p>
             <a:pPr algn="ctr"/>
             <a:r>
-              <a:rPr sz="4400" b="1" i="0">
-                <a:solidFill>
-                  <a:srgbClr val="FFFFFF"/>
+              <a:rPr sz="2400" b="0" i="1">
+                <a:solidFill>
+                  <a:srgbClr val="AAAAAA"/>
                 </a:solidFill>
                 <a:latin typeface="Arial"/>
               </a:rPr>
-              <a:t>み神を          たたえよ</a:t>
+              <a:t>mikami wo    tataeyo</a:t>
             </a:r>
           </a:p>
         </p:txBody>
@@ -4188,8 +4153,8 @@
         </p:nvSpPr>
         <p:spPr>
           <a:xfrm>
-            <a:off x="594360" y="4251960"/>
-            <a:ext cx="11002975" cy="384048"/>
+            <a:off x="640080" y="4530852"/>
+            <a:ext cx="10911535" cy="310896"/>
           </a:xfrm>
           <a:prstGeom prst="rect">
             <a:avLst/>
@@ -4204,13 +4169,13 @@
           <a:p>
             <a:pPr algn="ctr"/>
             <a:r>
-              <a:rPr sz="2400" b="0" i="1">
-                <a:solidFill>
-                  <a:srgbClr val="B4B4B4"/>
+              <a:rPr sz="2000" b="0" i="1">
+                <a:solidFill>
+                  <a:srgbClr val="828282"/>
                 </a:solidFill>
                 <a:latin typeface="Arial"/>
               </a:rPr>
-              <a:t>mikami wo    tataeyo</a:t>
+              <a:t>Aleluia! Aleluia!</a:t>
             </a:r>
           </a:p>
         </p:txBody>
@@ -4223,8 +4188,8 @@
         </p:nvSpPr>
         <p:spPr>
           <a:xfrm>
-            <a:off x="594360" y="4672584"/>
-            <a:ext cx="11002975" cy="347472"/>
+            <a:off x="640080" y="4896612"/>
+            <a:ext cx="10911535" cy="310896"/>
           </a:xfrm>
           <a:prstGeom prst="rect">
             <a:avLst/>
@@ -4241,11 +4206,11 @@
             <a:r>
               <a:rPr sz="2000" b="0" i="1">
                 <a:solidFill>
-                  <a:srgbClr val="8C8C8C"/>
+                  <a:srgbClr val="828282"/>
                 </a:solidFill>
                 <a:latin typeface="Arial"/>
               </a:rPr>
-              <a:t/>
+              <a:t>Ó Sol ardente com teu raio dourado</a:t>
             </a:r>
           </a:p>
         </p:txBody>
@@ -4284,8 +4249,8 @@
         </p:nvSpPr>
         <p:spPr>
           <a:xfrm>
-            <a:off x="594360" y="2683764"/>
-            <a:ext cx="11002975" cy="685800"/>
+            <a:off x="640080" y="2500884"/>
+            <a:ext cx="10911535" cy="731520"/>
           </a:xfrm>
           <a:prstGeom prst="rect">
             <a:avLst/>
@@ -4300,7 +4265,7 @@
           <a:p>
             <a:pPr algn="ctr"/>
             <a:r>
-              <a:rPr sz="4400" b="1" i="0">
+              <a:rPr sz="4800" b="1" i="0">
                 <a:solidFill>
                   <a:srgbClr val="FFFFFF"/>
                 </a:solidFill>
@@ -4319,8 +4284,8 @@
         </p:nvSpPr>
         <p:spPr>
           <a:xfrm>
-            <a:off x="594360" y="3406140"/>
-            <a:ext cx="11002975" cy="384048"/>
+            <a:off x="640080" y="3268980"/>
+            <a:ext cx="10911535" cy="365760"/>
           </a:xfrm>
           <a:prstGeom prst="rect">
             <a:avLst/>
@@ -4337,7 +4302,7 @@
             <a:r>
               <a:rPr sz="2400" b="0" i="1">
                 <a:solidFill>
-                  <a:srgbClr val="B4B4B4"/>
+                  <a:srgbClr val="AAAAAA"/>
                 </a:solidFill>
                 <a:latin typeface="Arial"/>
               </a:rPr>
@@ -4354,8 +4319,8 @@
         </p:nvSpPr>
         <p:spPr>
           <a:xfrm>
-            <a:off x="594360" y="3826764"/>
-            <a:ext cx="11002975" cy="347472"/>
+            <a:off x="640080" y="4046220"/>
+            <a:ext cx="10911535" cy="310896"/>
           </a:xfrm>
           <a:prstGeom prst="rect">
             <a:avLst/>
@@ -4372,11 +4337,11 @@
             <a:r>
               <a:rPr sz="2000" b="0" i="1">
                 <a:solidFill>
-                  <a:srgbClr val="8C8C8C"/>
+                  <a:srgbClr val="828282"/>
                 </a:solidFill>
                 <a:latin typeface="Arial"/>
               </a:rPr>
-              <a:t/>
+              <a:t>Ó lua prateada brilhando suave</a:t>
             </a:r>
           </a:p>
         </p:txBody>
@@ -4415,8 +4380,8 @@
         </p:nvSpPr>
         <p:spPr>
           <a:xfrm>
-            <a:off x="594360" y="2258568"/>
-            <a:ext cx="11002975" cy="685800"/>
+            <a:off x="640080" y="2052828"/>
+            <a:ext cx="10911535" cy="731520"/>
           </a:xfrm>
           <a:prstGeom prst="rect">
             <a:avLst/>
@@ -4431,7 +4396,7 @@
           <a:p>
             <a:pPr algn="ctr"/>
             <a:r>
-              <a:rPr sz="3705" b="1" i="0">
+              <a:rPr sz="4000" b="1" i="0">
                 <a:solidFill>
                   <a:srgbClr val="FFFFFF"/>
                 </a:solidFill>
@@ -4450,8 +4415,8 @@
         </p:nvSpPr>
         <p:spPr>
           <a:xfrm>
-            <a:off x="594360" y="2980944"/>
-            <a:ext cx="11002975" cy="347472"/>
+            <a:off x="640080" y="2985516"/>
+            <a:ext cx="10911535" cy="731520"/>
           </a:xfrm>
           <a:prstGeom prst="rect">
             <a:avLst/>
@@ -4466,83 +4431,13 @@
           <a:p>
             <a:pPr algn="ctr"/>
             <a:r>
-              <a:rPr sz="2200" b="0" i="1">
-                <a:solidFill>
-                  <a:srgbClr val="8C8C8C"/>
-                </a:solidFill>
-                <a:latin typeface="Arial"/>
-              </a:rPr>
-              <a:t/>
-            </a:r>
-          </a:p>
-        </p:txBody>
-      </p:sp>
-      <p:sp>
-        <p:nvSpPr>
-          <p:cNvPr id="4" name="TextBox 3"/>
-          <p:cNvSpPr txBox="1"/>
-          <p:nvPr/>
-        </p:nvSpPr>
-        <p:spPr>
-          <a:xfrm>
-            <a:off x="594360" y="3529584"/>
-            <a:ext cx="11002975" cy="685800"/>
-          </a:xfrm>
-          <a:prstGeom prst="rect">
-            <a:avLst/>
-          </a:prstGeom>
-          <a:noFill/>
-        </p:spPr>
-        <p:txBody>
-          <a:bodyPr wrap="square">
-            <a:spAutoFit/>
-          </a:bodyPr>
-          <a:lstStyle/>
-          <a:p>
-            <a:pPr algn="ctr"/>
-            <a:r>
-              <a:rPr sz="4400" b="1" i="0">
+              <a:rPr sz="4800" b="1" i="0">
                 <a:solidFill>
                   <a:srgbClr val="FFFFFF"/>
                 </a:solidFill>
                 <a:latin typeface="Arial"/>
               </a:rPr>
               <a:t>Erguei a voz e cantai conosco</a:t>
-            </a:r>
-          </a:p>
-        </p:txBody>
-      </p:sp>
-      <p:sp>
-        <p:nvSpPr>
-          <p:cNvPr id="5" name="TextBox 4"/>
-          <p:cNvSpPr txBox="1"/>
-          <p:nvPr/>
-        </p:nvSpPr>
-        <p:spPr>
-          <a:xfrm>
-            <a:off x="594360" y="4251960"/>
-            <a:ext cx="11002975" cy="347472"/>
-          </a:xfrm>
-          <a:prstGeom prst="rect">
-            <a:avLst/>
-          </a:prstGeom>
-          <a:noFill/>
-        </p:spPr>
-        <p:txBody>
-          <a:bodyPr wrap="square">
-            <a:spAutoFit/>
-          </a:bodyPr>
-          <a:lstStyle/>
-          <a:p>
-            <a:pPr algn="ctr"/>
-            <a:r>
-              <a:rPr sz="2200" b="0" i="1">
-                <a:solidFill>
-                  <a:srgbClr val="8C8C8C"/>
-                </a:solidFill>
-                <a:latin typeface="Arial"/>
-              </a:rPr>
-              <a:t/>
             </a:r>
           </a:p>
         </p:txBody>
@@ -4581,8 +4476,8 @@
         </p:nvSpPr>
         <p:spPr>
           <a:xfrm>
-            <a:off x="594360" y="2258568"/>
-            <a:ext cx="11002975" cy="685800"/>
+            <a:off x="640080" y="2052828"/>
+            <a:ext cx="10911535" cy="731520"/>
           </a:xfrm>
           <a:prstGeom prst="rect">
             <a:avLst/>
@@ -4597,7 +4492,7 @@
           <a:p>
             <a:pPr algn="ctr"/>
             <a:r>
-              <a:rPr sz="4400" b="1" i="0">
+              <a:rPr sz="4800" b="1" i="0">
                 <a:solidFill>
                   <a:srgbClr val="FFFFFF"/>
                 </a:solidFill>
@@ -4616,8 +4511,8 @@
         </p:nvSpPr>
         <p:spPr>
           <a:xfrm>
-            <a:off x="594360" y="2980944"/>
-            <a:ext cx="11002975" cy="347472"/>
+            <a:off x="640080" y="2985516"/>
+            <a:ext cx="10911535" cy="731520"/>
           </a:xfrm>
           <a:prstGeom prst="rect">
             <a:avLst/>
@@ -4632,83 +4527,13 @@
           <a:p>
             <a:pPr algn="ctr"/>
             <a:r>
-              <a:rPr sz="2200" b="0" i="1">
-                <a:solidFill>
-                  <a:srgbClr val="8C8C8C"/>
-                </a:solidFill>
-                <a:latin typeface="Arial"/>
-              </a:rPr>
-              <a:t/>
-            </a:r>
-          </a:p>
-        </p:txBody>
-      </p:sp>
-      <p:sp>
-        <p:nvSpPr>
-          <p:cNvPr id="4" name="TextBox 3"/>
-          <p:cNvSpPr txBox="1"/>
-          <p:nvPr/>
-        </p:nvSpPr>
-        <p:spPr>
-          <a:xfrm>
-            <a:off x="594360" y="3529584"/>
-            <a:ext cx="11002975" cy="685800"/>
-          </a:xfrm>
-          <a:prstGeom prst="rect">
-            <a:avLst/>
-          </a:prstGeom>
-          <a:noFill/>
-        </p:spPr>
-        <p:txBody>
-          <a:bodyPr wrap="square">
-            <a:spAutoFit/>
-          </a:bodyPr>
-          <a:lstStyle/>
-          <a:p>
-            <a:pPr algn="ctr"/>
-            <a:r>
-              <a:rPr sz="4141" b="1" i="0">
+              <a:rPr sz="4500" b="1" i="0">
                 <a:solidFill>
                   <a:srgbClr val="FFFFFF"/>
                 </a:solidFill>
                 <a:latin typeface="Arial"/>
               </a:rPr>
               <a:t>Ó Sol ardente com teu raio dourado</a:t>
-            </a:r>
-          </a:p>
-        </p:txBody>
-      </p:sp>
-      <p:sp>
-        <p:nvSpPr>
-          <p:cNvPr id="5" name="TextBox 4"/>
-          <p:cNvSpPr txBox="1"/>
-          <p:nvPr/>
-        </p:nvSpPr>
-        <p:spPr>
-          <a:xfrm>
-            <a:off x="594360" y="4251960"/>
-            <a:ext cx="11002975" cy="347472"/>
-          </a:xfrm>
-          <a:prstGeom prst="rect">
-            <a:avLst/>
-          </a:prstGeom>
-          <a:noFill/>
-        </p:spPr>
-        <p:txBody>
-          <a:bodyPr wrap="square">
-            <a:spAutoFit/>
-          </a:bodyPr>
-          <a:lstStyle/>
-          <a:p>
-            <a:pPr algn="ctr"/>
-            <a:r>
-              <a:rPr sz="2200" b="0" i="1">
-                <a:solidFill>
-                  <a:srgbClr val="8C8C8C"/>
-                </a:solidFill>
-                <a:latin typeface="Arial"/>
-              </a:rPr>
-              <a:t/>
             </a:r>
           </a:p>
         </p:txBody>
@@ -4747,8 +4572,8 @@
         </p:nvSpPr>
         <p:spPr>
           <a:xfrm>
-            <a:off x="594360" y="2258568"/>
-            <a:ext cx="11002975" cy="685800"/>
+            <a:off x="640080" y="2052828"/>
+            <a:ext cx="10911535" cy="731520"/>
           </a:xfrm>
           <a:prstGeom prst="rect">
             <a:avLst/>
@@ -4763,7 +4588,7 @@
           <a:p>
             <a:pPr algn="ctr"/>
             <a:r>
-              <a:rPr sz="4400" b="1" i="0">
+              <a:rPr sz="4800" b="1" i="0">
                 <a:solidFill>
                   <a:srgbClr val="FFFFFF"/>
                 </a:solidFill>
@@ -4782,8 +4607,8 @@
         </p:nvSpPr>
         <p:spPr>
           <a:xfrm>
-            <a:off x="594360" y="2980944"/>
-            <a:ext cx="11002975" cy="347472"/>
+            <a:off x="640080" y="2985516"/>
+            <a:ext cx="10911535" cy="731520"/>
           </a:xfrm>
           <a:prstGeom prst="rect">
             <a:avLst/>
@@ -4798,83 +4623,13 @@
           <a:p>
             <a:pPr algn="ctr"/>
             <a:r>
-              <a:rPr sz="2200" b="0" i="1">
-                <a:solidFill>
-                  <a:srgbClr val="8C8C8C"/>
-                </a:solidFill>
-                <a:latin typeface="Arial"/>
-              </a:rPr>
-              <a:t/>
-            </a:r>
-          </a:p>
-        </p:txBody>
-      </p:sp>
-      <p:sp>
-        <p:nvSpPr>
-          <p:cNvPr id="4" name="TextBox 3"/>
-          <p:cNvSpPr txBox="1"/>
-          <p:nvPr/>
-        </p:nvSpPr>
-        <p:spPr>
-          <a:xfrm>
-            <a:off x="594360" y="3529584"/>
-            <a:ext cx="11002975" cy="685800"/>
-          </a:xfrm>
-          <a:prstGeom prst="rect">
-            <a:avLst/>
-          </a:prstGeom>
-          <a:noFill/>
-        </p:spPr>
-        <p:txBody>
-          <a:bodyPr wrap="square">
-            <a:spAutoFit/>
-          </a:bodyPr>
-          <a:lstStyle/>
-          <a:p>
-            <a:pPr algn="ctr"/>
-            <a:r>
-              <a:rPr sz="4400" b="1" i="0">
+              <a:rPr sz="4800" b="1" i="0">
                 <a:solidFill>
                   <a:srgbClr val="FFFFFF"/>
                 </a:solidFill>
                 <a:latin typeface="Arial"/>
               </a:rPr>
               <a:t>Ó louvai-O! Ó louvai-O!</a:t>
-            </a:r>
-          </a:p>
-        </p:txBody>
-      </p:sp>
-      <p:sp>
-        <p:nvSpPr>
-          <p:cNvPr id="5" name="TextBox 4"/>
-          <p:cNvSpPr txBox="1"/>
-          <p:nvPr/>
-        </p:nvSpPr>
-        <p:spPr>
-          <a:xfrm>
-            <a:off x="594360" y="4251960"/>
-            <a:ext cx="11002975" cy="347472"/>
-          </a:xfrm>
-          <a:prstGeom prst="rect">
-            <a:avLst/>
-          </a:prstGeom>
-          <a:noFill/>
-        </p:spPr>
-        <p:txBody>
-          <a:bodyPr wrap="square">
-            <a:spAutoFit/>
-          </a:bodyPr>
-          <a:lstStyle/>
-          <a:p>
-            <a:pPr algn="ctr"/>
-            <a:r>
-              <a:rPr sz="2200" b="0" i="1">
-                <a:solidFill>
-                  <a:srgbClr val="8C8C8C"/>
-                </a:solidFill>
-                <a:latin typeface="Arial"/>
-              </a:rPr>
-              <a:t/>
             </a:r>
           </a:p>
         </p:txBody>

--- a/output_pptx/All_Creatures_Of_Our_God_And_King.pptx
+++ b/output_pptx/All_Creatures_Of_Our_God_And_King.pptx
@@ -3376,6 +3376,41 @@
           </a:p>
         </p:txBody>
       </p:sp>
+      <p:sp>
+        <p:nvSpPr>
+          <p:cNvPr id="3" name="TextBox 2"/>
+          <p:cNvSpPr txBox="1"/>
+          <p:nvPr/>
+        </p:nvSpPr>
+        <p:spPr>
+          <a:xfrm>
+            <a:off x="640080" y="3845052"/>
+            <a:ext cx="10911535" cy="310896"/>
+          </a:xfrm>
+          <a:prstGeom prst="rect">
+            <a:avLst/>
+          </a:prstGeom>
+          <a:noFill/>
+        </p:spPr>
+        <p:txBody>
+          <a:bodyPr wrap="square">
+            <a:spAutoFit/>
+          </a:bodyPr>
+          <a:lstStyle/>
+          <a:p>
+            <a:pPr algn="ctr"/>
+            <a:r>
+              <a:rPr sz="2000" b="0" i="0">
+                <a:solidFill>
+                  <a:srgbClr val="828282"/>
+                </a:solidFill>
+                <a:latin typeface="Arial"/>
+              </a:rPr>
+              <a:t>ハレルヤ！ハレルヤ！ハレルヤ！</a:t>
+            </a:r>
+          </a:p>
+        </p:txBody>
+      </p:sp>
     </p:spTree>
   </p:cSld>
   <p:clrMapOvr>
@@ -4442,6 +4477,76 @@
           </a:p>
         </p:txBody>
       </p:sp>
+      <p:sp>
+        <p:nvSpPr>
+          <p:cNvPr id="4" name="TextBox 3"/>
+          <p:cNvSpPr txBox="1"/>
+          <p:nvPr/>
+        </p:nvSpPr>
+        <p:spPr>
+          <a:xfrm>
+            <a:off x="640080" y="4128516"/>
+            <a:ext cx="10911535" cy="310896"/>
+          </a:xfrm>
+          <a:prstGeom prst="rect">
+            <a:avLst/>
+          </a:prstGeom>
+          <a:noFill/>
+        </p:spPr>
+        <p:txBody>
+          <a:bodyPr wrap="square">
+            <a:spAutoFit/>
+          </a:bodyPr>
+          <a:lstStyle/>
+          <a:p>
+            <a:pPr algn="ctr"/>
+            <a:r>
+              <a:rPr sz="2000" b="0" i="0">
+                <a:solidFill>
+                  <a:srgbClr val="828282"/>
+                </a:solidFill>
+                <a:latin typeface="Arial"/>
+              </a:rPr>
+              <a:t>私たちの神と王のすべての被造物よ</a:t>
+            </a:r>
+          </a:p>
+        </p:txBody>
+      </p:sp>
+      <p:sp>
+        <p:nvSpPr>
+          <p:cNvPr id="5" name="TextBox 4"/>
+          <p:cNvSpPr txBox="1"/>
+          <p:nvPr/>
+        </p:nvSpPr>
+        <p:spPr>
+          <a:xfrm>
+            <a:off x="640080" y="4494276"/>
+            <a:ext cx="10911535" cy="310896"/>
+          </a:xfrm>
+          <a:prstGeom prst="rect">
+            <a:avLst/>
+          </a:prstGeom>
+          <a:noFill/>
+        </p:spPr>
+        <p:txBody>
+          <a:bodyPr wrap="square">
+            <a:spAutoFit/>
+          </a:bodyPr>
+          <a:lstStyle/>
+          <a:p>
+            <a:pPr algn="ctr"/>
+            <a:r>
+              <a:rPr sz="2000" b="0" i="0">
+                <a:solidFill>
+                  <a:srgbClr val="828282"/>
+                </a:solidFill>
+                <a:latin typeface="Arial"/>
+              </a:rPr>
+              <a:t>声を上げて私たちと共に歌おう</a:t>
+            </a:r>
+          </a:p>
+        </p:txBody>
+      </p:sp>
     </p:spTree>
   </p:cSld>
   <p:clrMapOvr>
@@ -4538,6 +4643,76 @@
           </a:p>
         </p:txBody>
       </p:sp>
+      <p:sp>
+        <p:nvSpPr>
+          <p:cNvPr id="4" name="TextBox 3"/>
+          <p:cNvSpPr txBox="1"/>
+          <p:nvPr/>
+        </p:nvSpPr>
+        <p:spPr>
+          <a:xfrm>
+            <a:off x="640080" y="4128516"/>
+            <a:ext cx="10911535" cy="310896"/>
+          </a:xfrm>
+          <a:prstGeom prst="rect">
+            <a:avLst/>
+          </a:prstGeom>
+          <a:noFill/>
+        </p:spPr>
+        <p:txBody>
+          <a:bodyPr wrap="square">
+            <a:spAutoFit/>
+          </a:bodyPr>
+          <a:lstStyle/>
+          <a:p>
+            <a:pPr algn="ctr"/>
+            <a:r>
+              <a:rPr sz="2000" b="0" i="0">
+                <a:solidFill>
+                  <a:srgbClr val="828282"/>
+                </a:solidFill>
+                <a:latin typeface="Arial"/>
+              </a:rPr>
+              <a:t>ハレルヤ！ハレルヤ！</a:t>
+            </a:r>
+          </a:p>
+        </p:txBody>
+      </p:sp>
+      <p:sp>
+        <p:nvSpPr>
+          <p:cNvPr id="5" name="TextBox 4"/>
+          <p:cNvSpPr txBox="1"/>
+          <p:nvPr/>
+        </p:nvSpPr>
+        <p:spPr>
+          <a:xfrm>
+            <a:off x="640080" y="4494276"/>
+            <a:ext cx="10911535" cy="310896"/>
+          </a:xfrm>
+          <a:prstGeom prst="rect">
+            <a:avLst/>
+          </a:prstGeom>
+          <a:noFill/>
+        </p:spPr>
+        <p:txBody>
+          <a:bodyPr wrap="square">
+            <a:spAutoFit/>
+          </a:bodyPr>
+          <a:lstStyle/>
+          <a:p>
+            <a:pPr algn="ctr"/>
+            <a:r>
+              <a:rPr sz="2000" b="0" i="0">
+                <a:solidFill>
+                  <a:srgbClr val="828282"/>
+                </a:solidFill>
+                <a:latin typeface="Arial"/>
+              </a:rPr>
+              <a:t>おお燃える太陽よ、金色の光で</a:t>
+            </a:r>
+          </a:p>
+        </p:txBody>
+      </p:sp>
     </p:spTree>
   </p:cSld>
   <p:clrMapOvr>
@@ -4630,6 +4805,76 @@
                 <a:latin typeface="Arial"/>
               </a:rPr>
               <a:t>Ó louvai-O! Ó louvai-O!</a:t>
+            </a:r>
+          </a:p>
+        </p:txBody>
+      </p:sp>
+      <p:sp>
+        <p:nvSpPr>
+          <p:cNvPr id="4" name="TextBox 3"/>
+          <p:cNvSpPr txBox="1"/>
+          <p:nvPr/>
+        </p:nvSpPr>
+        <p:spPr>
+          <a:xfrm>
+            <a:off x="640080" y="4128516"/>
+            <a:ext cx="10911535" cy="310896"/>
+          </a:xfrm>
+          <a:prstGeom prst="rect">
+            <a:avLst/>
+          </a:prstGeom>
+          <a:noFill/>
+        </p:spPr>
+        <p:txBody>
+          <a:bodyPr wrap="square">
+            <a:spAutoFit/>
+          </a:bodyPr>
+          <a:lstStyle/>
+          <a:p>
+            <a:pPr algn="ctr"/>
+            <a:r>
+              <a:rPr sz="2000" b="0" i="0">
+                <a:solidFill>
+                  <a:srgbClr val="828282"/>
+                </a:solidFill>
+                <a:latin typeface="Arial"/>
+              </a:rPr>
+              <a:t>おお銀色に輝く月よ、優しく光りて</a:t>
+            </a:r>
+          </a:p>
+        </p:txBody>
+      </p:sp>
+      <p:sp>
+        <p:nvSpPr>
+          <p:cNvPr id="5" name="TextBox 4"/>
+          <p:cNvSpPr txBox="1"/>
+          <p:nvPr/>
+        </p:nvSpPr>
+        <p:spPr>
+          <a:xfrm>
+            <a:off x="640080" y="4494276"/>
+            <a:ext cx="10911535" cy="310896"/>
+          </a:xfrm>
+          <a:prstGeom prst="rect">
+            <a:avLst/>
+          </a:prstGeom>
+          <a:noFill/>
+        </p:spPr>
+        <p:txBody>
+          <a:bodyPr wrap="square">
+            <a:spAutoFit/>
+          </a:bodyPr>
+          <a:lstStyle/>
+          <a:p>
+            <a:pPr algn="ctr"/>
+            <a:r>
+              <a:rPr sz="2000" b="0" i="0">
+                <a:solidFill>
+                  <a:srgbClr val="828282"/>
+                </a:solidFill>
+                <a:latin typeface="Arial"/>
+              </a:rPr>
+              <a:t>おお主を褒め称えよ！おお主を褒め称えよ！</a:t>
             </a:r>
           </a:p>
         </p:txBody>
